--- a/docs/architecture/export/Linux-Fleet-Automation-Architecture-Overview.pptx
+++ b/docs/architecture/export/Linux-Fleet-Automation-Architecture-Overview.pptx
@@ -2270,7 +2270,7 @@
       </p:sp>
       <p:pic>
         <p:nvPicPr>
-          <p:cNvPr id="4" name="Image 0" descr="docs/architecture/export/01-system-overview.png">    </p:cNvPr>
+          <p:cNvPr id="4" name="Image 0" descr="/home/user/workspace/ansible_operations/docs/architecture/export/01-system-overview.png">    </p:cNvPr>
           <p:cNvPicPr>
             <a:picLocks noChangeAspect="1"/>
           </p:cNvPicPr>
@@ -2482,7 +2482,7 @@
       </p:sp>
       <p:pic>
         <p:nvPicPr>
-          <p:cNvPr id="4" name="Image 0" descr="docs/architecture/export/02-log-collector-pipelines.png">    </p:cNvPr>
+          <p:cNvPr id="4" name="Image 0" descr="/home/user/workspace/ansible_operations/docs/architecture/export/02-log-collector-pipelines.png">    </p:cNvPr>
           <p:cNvPicPr>
             <a:picLocks noChangeAspect="1"/>
           </p:cNvPicPr>
@@ -2694,7 +2694,7 @@
       </p:sp>
       <p:pic>
         <p:nvPicPr>
-          <p:cNvPr id="4" name="Image 0" descr="docs/architecture/export/03-centralized-logging-role-order.png">    </p:cNvPr>
+          <p:cNvPr id="4" name="Image 0" descr="/home/user/workspace/ansible_operations/docs/architecture/export/03-centralized-logging-role-order.png">    </p:cNvPr>
           <p:cNvPicPr>
             <a:picLocks noChangeAspect="1"/>
           </p:cNvPicPr>
